--- a/slides/midterm_report.pptx
+++ b/slides/midterm_report.pptx
@@ -15,6 +15,10 @@
     <p:sldId id="266" r:id="rId11"/>
     <p:sldId id="267" r:id="rId12"/>
     <p:sldId id="268" r:id="rId13"/>
+    <p:sldId id="269" r:id="rId14"/>
+    <p:sldId id="270" r:id="rId15"/>
+    <p:sldId id="271" r:id="rId16"/>
+    <p:sldId id="272" r:id="rId17"/>
   </p:sldIdLst>
   <p:sldSz cx="12192000" cy="6858000" type="wide"/>
   <p:notesSz cx="6858000" cy="9144000"/>
@@ -214,7 +218,7 @@
                 <a:latin typeface="Arial"/>
                 <a:ea typeface="Microsoft YaHei"/>
               </a:rPr>
-              <a:t>样例结果：州级违约风险</a:t>
+              <a:t>真实发现 3：FICO 与违约率</a:t>
             </a:r>
           </a:p>
         </p:txBody>
@@ -250,37 +254,37 @@
                 <a:latin typeface="Arial"/>
                 <a:ea typeface="Microsoft YaHei"/>
               </a:rPr>
-              <a:t>按州聚合样例贷款数量与违约率。</a:t>
-            </a:r>
-          </a:p>
-          <a:p>
-            <a:pPr marL="342900" indent="-171450">
-              <a:buChar char="•"/>
-            </a:pPr>
-            <a:r>
-              <a:rPr lang="zh-CN" sz="2000">
-                <a:solidFill>
-                  <a:srgbClr val="374151"/>
-                </a:solidFill>
-                <a:latin typeface="Arial"/>
-                <a:ea typeface="Microsoft YaHei"/>
-              </a:rPr>
-              <a:t>使用 SQLite SQL 完成州级统计。</a:t>
-            </a:r>
-          </a:p>
-          <a:p>
-            <a:pPr marL="342900" indent="-171450">
-              <a:buChar char="•"/>
-            </a:pPr>
-            <a:r>
-              <a:rPr lang="zh-CN" sz="2000">
-                <a:solidFill>
-                  <a:srgbClr val="374151"/>
-                </a:solidFill>
-                <a:latin typeface="Arial"/>
-                <a:ea typeface="Microsoft YaHei"/>
-              </a:rPr>
-              <a:t>后续将接入 ACS 收入、贫困率、失业率等真实区域变量。</a:t>
+              <a:t>FICO 分数越低，违约率通常越高。</a:t>
+            </a:r>
+          </a:p>
+          <a:p>
+            <a:pPr marL="342900" indent="-171450">
+              <a:buChar char="•"/>
+            </a:pPr>
+            <a:r>
+              <a:rPr lang="zh-CN" sz="2000">
+                <a:solidFill>
+                  <a:srgbClr val="374151"/>
+                </a:solidFill>
+                <a:latin typeface="Arial"/>
+                <a:ea typeface="Microsoft YaHei"/>
+              </a:rPr>
+              <a:t>传统信用评分仍有明显解释力。</a:t>
+            </a:r>
+          </a:p>
+          <a:p>
+            <a:pPr marL="342900" indent="-171450">
+              <a:buChar char="•"/>
+            </a:pPr>
+            <a:r>
+              <a:rPr lang="zh-CN" sz="2000">
+                <a:solidFill>
+                  <a:srgbClr val="374151"/>
+                </a:solidFill>
+                <a:latin typeface="Arial"/>
+                <a:ea typeface="Microsoft YaHei"/>
+              </a:rPr>
+              <a:t>多源数据的价值不是替代 FICO，而是补充地区经济和宏观环境信息。</a:t>
             </a:r>
           </a:p>
         </p:txBody>
@@ -360,7 +364,7 @@
                 <a:latin typeface="Arial"/>
                 <a:ea typeface="Microsoft YaHei"/>
               </a:rPr>
-              <a:t>风险与备选方案</a:t>
+              <a:t>真实发现 4：时间趋势</a:t>
             </a:r>
           </a:p>
         </p:txBody>
@@ -374,78 +378,85 @@
         <p:spPr>
           <a:xfrm>
             <a:off x="685800" y="1143000"/>
-            <a:ext cx="10607040" cy="4389120"/>
-          </a:xfrm>
-          <a:prstGeom prst="rect">
-            <a:avLst/>
-          </a:prstGeom>
-          <a:noFill/>
-        </p:spPr>
-        <p:txBody>
-          <a:bodyPr wrap="square"/>
-          <a:lstStyle/>
-          <a:p>
-            <a:pPr marL="342900" indent="-171450">
-              <a:buChar char="•"/>
-            </a:pPr>
-            <a:r>
-              <a:rPr lang="zh-CN" sz="2000">
-                <a:solidFill>
-                  <a:srgbClr val="374151"/>
-                </a:solidFill>
-                <a:latin typeface="Arial"/>
-                <a:ea typeface="Microsoft YaHei"/>
-              </a:rPr>
-              <a:t>Kaggle 数据下载慢：先展示样例流程，下载后补跑。</a:t>
-            </a:r>
-          </a:p>
-          <a:p>
-            <a:pPr marL="342900" indent="-171450">
-              <a:buChar char="•"/>
-            </a:pPr>
-            <a:r>
-              <a:rPr lang="zh-CN" sz="2000">
-                <a:solidFill>
-                  <a:srgbClr val="374151"/>
-                </a:solidFill>
-                <a:latin typeface="Arial"/>
-                <a:ea typeface="Microsoft YaHei"/>
-              </a:rPr>
-              <a:t>数据量过大：先抽样分析，再保留抽样策略说明。</a:t>
-            </a:r>
-          </a:p>
-          <a:p>
-            <a:pPr marL="342900" indent="-171450">
-              <a:buChar char="•"/>
-            </a:pPr>
-            <a:r>
-              <a:rPr lang="zh-CN" sz="2000">
-                <a:solidFill>
-                  <a:srgbClr val="374151"/>
-                </a:solidFill>
-                <a:latin typeface="Arial"/>
-                <a:ea typeface="Microsoft YaHei"/>
-              </a:rPr>
-              <a:t>多源粒度不一致：降到州级、年度/季度级对齐。</a:t>
-            </a:r>
-          </a:p>
-          <a:p>
-            <a:pPr marL="342900" indent="-171450">
-              <a:buChar char="•"/>
-            </a:pPr>
-            <a:r>
-              <a:rPr lang="zh-CN" sz="2000">
-                <a:solidFill>
-                  <a:srgbClr val="374151"/>
-                </a:solidFill>
-                <a:latin typeface="Arial"/>
-                <a:ea typeface="Microsoft YaHei"/>
-              </a:rPr>
-              <a:t>模型效果不明显：强调解释性分析和多源变量贡献。</a:t>
-            </a:r>
-          </a:p>
-        </p:txBody>
-      </p:sp>
+            <a:ext cx="5486400" cy="4389120"/>
+          </a:xfrm>
+          <a:prstGeom prst="rect">
+            <a:avLst/>
+          </a:prstGeom>
+          <a:noFill/>
+        </p:spPr>
+        <p:txBody>
+          <a:bodyPr wrap="square"/>
+          <a:lstStyle/>
+          <a:p>
+            <a:pPr marL="342900" indent="-171450">
+              <a:buChar char="•"/>
+            </a:pPr>
+            <a:r>
+              <a:rPr lang="zh-CN" sz="2000">
+                <a:solidFill>
+                  <a:srgbClr val="374151"/>
+                </a:solidFill>
+                <a:latin typeface="Arial"/>
+                <a:ea typeface="Microsoft YaHei"/>
+              </a:rPr>
+              <a:t>按发放年份统计违约率，可以观察不同信贷周期下的风险变化。</a:t>
+            </a:r>
+          </a:p>
+          <a:p>
+            <a:pPr marL="342900" indent="-171450">
+              <a:buChar char="•"/>
+            </a:pPr>
+            <a:r>
+              <a:rPr lang="zh-CN" sz="2000">
+                <a:solidFill>
+                  <a:srgbClr val="374151"/>
+                </a:solidFill>
+                <a:latin typeface="Arial"/>
+                <a:ea typeface="Microsoft YaHei"/>
+              </a:rPr>
+              <a:t>后续将与 Fed 利率、通胀、失业率做年度/季度级对齐。</a:t>
+            </a:r>
+          </a:p>
+          <a:p>
+            <a:pPr marL="342900" indent="-171450">
+              <a:buChar char="•"/>
+            </a:pPr>
+            <a:r>
+              <a:rPr lang="zh-CN" sz="2000">
+                <a:solidFill>
+                  <a:srgbClr val="374151"/>
+                </a:solidFill>
+                <a:latin typeface="Arial"/>
+                <a:ea typeface="Microsoft YaHei"/>
+              </a:rPr>
+              <a:t>目标：解释宏观环境是否能解释时间维度的风险波动。</a:t>
+            </a:r>
+          </a:p>
+        </p:txBody>
+      </p:sp>
+      <p:pic>
+        <p:nvPicPr>
+          <p:cNvPr id="4" name="Picture 4"/>
+          <p:cNvPicPr/>
+          <p:nvPr/>
+        </p:nvPicPr>
+        <p:blipFill>
+          <a:blip r:embed="rId2"/>
+          <a:stretch>
+            <a:fillRect/>
+          </a:stretch>
+        </p:blipFill>
+        <p:spPr>
+          <a:xfrm>
+            <a:off x="6309360" y="1325880"/>
+            <a:ext cx="5120640" cy="3108960"/>
+          </a:xfrm>
+          <a:prstGeom prst="rect">
+            <a:avLst/>
+          </a:prstGeom>
+        </p:spPr>
+      </p:pic>
     </p:spTree>
   </p:cSld>
   <p:clrMapOvr>
@@ -499,7 +510,7 @@
                 <a:latin typeface="Arial"/>
                 <a:ea typeface="Microsoft YaHei"/>
               </a:rPr>
-              <a:t>后续计划</a:t>
+              <a:t>真实发现 5：州级差异</a:t>
             </a:r>
           </a:p>
         </p:txBody>
@@ -513,93 +524,85 @@
         <p:spPr>
           <a:xfrm>
             <a:off x="685800" y="1143000"/>
-            <a:ext cx="10607040" cy="4389120"/>
-          </a:xfrm>
-          <a:prstGeom prst="rect">
-            <a:avLst/>
-          </a:prstGeom>
-          <a:noFill/>
-        </p:spPr>
-        <p:txBody>
-          <a:bodyPr wrap="square"/>
-          <a:lstStyle/>
-          <a:p>
-            <a:pPr marL="342900" indent="-171450">
-              <a:buChar char="•"/>
-            </a:pPr>
-            <a:r>
-              <a:rPr lang="zh-CN" sz="2000">
-                <a:solidFill>
-                  <a:srgbClr val="374151"/>
-                </a:solidFill>
-                <a:latin typeface="Arial"/>
-                <a:ea typeface="Microsoft YaHei"/>
-              </a:rPr>
-              <a:t>5/22–5/26：下载 Lending Club / Home Credit，完成字段筛选和基础清洗。</a:t>
-            </a:r>
-          </a:p>
-          <a:p>
-            <a:pPr marL="342900" indent="-171450">
-              <a:buChar char="•"/>
-            </a:pPr>
-            <a:r>
-              <a:rPr lang="zh-CN" sz="2000">
-                <a:solidFill>
-                  <a:srgbClr val="374151"/>
-                </a:solidFill>
-                <a:latin typeface="Arial"/>
-                <a:ea typeface="Microsoft YaHei"/>
-              </a:rPr>
-              <a:t>5/27–6/1：接入真实 ACS / Fed 数据，完成州级和时间级融合。</a:t>
-            </a:r>
-          </a:p>
-          <a:p>
-            <a:pPr marL="342900" indent="-171450">
-              <a:buChar char="•"/>
-            </a:pPr>
-            <a:r>
-              <a:rPr lang="zh-CN" sz="2000">
-                <a:solidFill>
-                  <a:srgbClr val="374151"/>
-                </a:solidFill>
-                <a:latin typeface="Arial"/>
-                <a:ea typeface="Microsoft YaHei"/>
-              </a:rPr>
-              <a:t>6/2–6/6：完成统计分析、可视化和单源/多源对比。</a:t>
-            </a:r>
-          </a:p>
-          <a:p>
-            <a:pPr marL="342900" indent="-171450">
-              <a:buChar char="•"/>
-            </a:pPr>
-            <a:r>
-              <a:rPr lang="zh-CN" sz="2000">
-                <a:solidFill>
-                  <a:srgbClr val="374151"/>
-                </a:solidFill>
-                <a:latin typeface="Arial"/>
-                <a:ea typeface="Microsoft YaHei"/>
-              </a:rPr>
-              <a:t>6/7–6/10：完成最终汇报 PPT 和展示材料。</a:t>
-            </a:r>
-          </a:p>
-          <a:p>
-            <a:pPr marL="342900" indent="-171450">
-              <a:buChar char="•"/>
-            </a:pPr>
-            <a:r>
-              <a:rPr lang="zh-CN" sz="2000">
-                <a:solidFill>
-                  <a:srgbClr val="374151"/>
-                </a:solidFill>
-                <a:latin typeface="Arial"/>
-                <a:ea typeface="Microsoft YaHei"/>
-              </a:rPr>
-              <a:t>6/11–6/17：完成最终报告、代码整理和演示视频。</a:t>
-            </a:r>
-          </a:p>
-        </p:txBody>
-      </p:sp>
+            <a:ext cx="5486400" cy="4389120"/>
+          </a:xfrm>
+          <a:prstGeom prst="rect">
+            <a:avLst/>
+          </a:prstGeom>
+          <a:noFill/>
+        </p:spPr>
+        <p:txBody>
+          <a:bodyPr wrap="square"/>
+          <a:lstStyle/>
+          <a:p>
+            <a:pPr marL="342900" indent="-171450">
+              <a:buChar char="•"/>
+            </a:pPr>
+            <a:r>
+              <a:rPr lang="zh-CN" sz="2000">
+                <a:solidFill>
+                  <a:srgbClr val="374151"/>
+                </a:solidFill>
+                <a:latin typeface="Arial"/>
+                <a:ea typeface="Microsoft YaHei"/>
+              </a:rPr>
+              <a:t>州级违约率存在明显地区差异。</a:t>
+            </a:r>
+          </a:p>
+          <a:p>
+            <a:pPr marL="342900" indent="-171450">
+              <a:buChar char="•"/>
+            </a:pPr>
+            <a:r>
+              <a:rPr lang="zh-CN" sz="2000">
+                <a:solidFill>
+                  <a:srgbClr val="374151"/>
+                </a:solidFill>
+                <a:latin typeface="Arial"/>
+                <a:ea typeface="Microsoft YaHei"/>
+              </a:rPr>
+              <a:t>样本量超过 1000 的州中，MS 违约率最高，约 28.37%。</a:t>
+            </a:r>
+          </a:p>
+          <a:p>
+            <a:pPr marL="342900" indent="-171450">
+              <a:buChar char="•"/>
+            </a:pPr>
+            <a:r>
+              <a:rPr lang="zh-CN" sz="2000">
+                <a:solidFill>
+                  <a:srgbClr val="374151"/>
+                </a:solidFill>
+                <a:latin typeface="Arial"/>
+                <a:ea typeface="Microsoft YaHei"/>
+              </a:rPr>
+              <a:t>后续将接入 ACS 收入、贫困率、就业等指标解释地区差异。</a:t>
+            </a:r>
+          </a:p>
+        </p:txBody>
+      </p:sp>
+      <p:pic>
+        <p:nvPicPr>
+          <p:cNvPr id="4" name="Picture 4"/>
+          <p:cNvPicPr/>
+          <p:nvPr/>
+        </p:nvPicPr>
+        <p:blipFill>
+          <a:blip r:embed="rId2"/>
+          <a:stretch>
+            <a:fillRect/>
+          </a:stretch>
+        </p:blipFill>
+        <p:spPr>
+          <a:xfrm>
+            <a:off x="6309360" y="1325880"/>
+            <a:ext cx="5120640" cy="3108960"/>
+          </a:xfrm>
+          <a:prstGeom prst="rect">
+            <a:avLst/>
+          </a:prstGeom>
+        </p:spPr>
+      </p:pic>
     </p:spTree>
   </p:cSld>
   <p:clrMapOvr>
@@ -653,7 +656,7 @@
                 <a:latin typeface="Arial"/>
                 <a:ea typeface="Microsoft YaHei"/>
               </a:rPr>
-              <a:t>小组分工与总结</a:t>
+              <a:t>哪些尝试奏效，哪些没有</a:t>
             </a:r>
           </a:p>
         </p:txBody>
@@ -689,67 +692,668 @@
                 <a:latin typeface="Arial"/>
                 <a:ea typeface="Microsoft YaHei"/>
               </a:rPr>
-              <a:t>成员 A：贷款数据获取与清洗。</a:t>
-            </a:r>
-          </a:p>
-          <a:p>
-            <a:pPr marL="342900" indent="-171450">
-              <a:buChar char="•"/>
-            </a:pPr>
-            <a:r>
-              <a:rPr lang="zh-CN" sz="2000">
-                <a:solidFill>
-                  <a:srgbClr val="374151"/>
-                </a:solidFill>
-                <a:latin typeface="Arial"/>
-                <a:ea typeface="Microsoft YaHei"/>
-              </a:rPr>
-              <a:t>成员 B：外部数据与多源融合。</a:t>
-            </a:r>
-          </a:p>
-          <a:p>
-            <a:pPr marL="342900" indent="-171450">
-              <a:buChar char="•"/>
-            </a:pPr>
-            <a:r>
-              <a:rPr lang="zh-CN" sz="2000">
-                <a:solidFill>
-                  <a:srgbClr val="374151"/>
-                </a:solidFill>
-                <a:latin typeface="Arial"/>
-                <a:ea typeface="Microsoft YaHei"/>
-              </a:rPr>
-              <a:t>成员 C：可视化、汇报与答辩准备。</a:t>
-            </a:r>
-          </a:p>
-          <a:p>
-            <a:pPr marL="342900" indent="-171450">
-              <a:buChar char="•"/>
-            </a:pPr>
-            <a:r>
-              <a:rPr lang="zh-CN" sz="2000">
-                <a:solidFill>
-                  <a:srgbClr val="374151"/>
-                </a:solidFill>
-                <a:latin typeface="Arial"/>
-                <a:ea typeface="Microsoft YaHei"/>
-              </a:rPr>
-              <a:t>中期已完成项目骨架、样例多源融合流水线和可展示图表。</a:t>
-            </a:r>
-          </a:p>
-          <a:p>
-            <a:pPr marL="342900" indent="-171450">
-              <a:buChar char="•"/>
-            </a:pPr>
-            <a:r>
-              <a:rPr lang="zh-CN" sz="2000">
-                <a:solidFill>
-                  <a:srgbClr val="374151"/>
-                </a:solidFill>
-                <a:latin typeface="Arial"/>
-                <a:ea typeface="Microsoft YaHei"/>
-              </a:rPr>
-              <a:t>下一阶段重点是接入真实数据并形成可靠结论。</a:t>
+              <a:t>奏效：Lending Club 大型 CSV 已成功流式处理，避免一次性加载内存。</a:t>
+            </a:r>
+          </a:p>
+          <a:p>
+            <a:pPr marL="342900" indent="-171450">
+              <a:buChar char="•"/>
+            </a:pPr>
+            <a:r>
+              <a:rPr lang="zh-CN" sz="2000">
+                <a:solidFill>
+                  <a:srgbClr val="374151"/>
+                </a:solidFill>
+                <a:latin typeface="Arial"/>
+                <a:ea typeface="Microsoft YaHei"/>
+              </a:rPr>
+              <a:t>奏效：贷款状态过滤避免把 Current 等未完结状态误判为不违约。</a:t>
+            </a:r>
+          </a:p>
+          <a:p>
+            <a:pPr marL="342900" indent="-171450">
+              <a:buChar char="•"/>
+            </a:pPr>
+            <a:r>
+              <a:rPr lang="zh-CN" sz="2000">
+                <a:solidFill>
+                  <a:srgbClr val="374151"/>
+                </a:solidFill>
+                <a:latin typeface="Arial"/>
+                <a:ea typeface="Microsoft YaHei"/>
+              </a:rPr>
+              <a:t>奏效：真实数据图表已可直接用于中期汇报。</a:t>
+            </a:r>
+          </a:p>
+          <a:p>
+            <a:pPr marL="342900" indent="-171450">
+              <a:buChar char="•"/>
+            </a:pPr>
+            <a:r>
+              <a:rPr lang="zh-CN" sz="2000">
+                <a:solidFill>
+                  <a:srgbClr val="374151"/>
+                </a:solidFill>
+                <a:latin typeface="Arial"/>
+                <a:ea typeface="Microsoft YaHei"/>
+              </a:rPr>
+              <a:t>受阻：Home Credit 需要先网页端接受 Kaggle competition rules。</a:t>
+            </a:r>
+          </a:p>
+          <a:p>
+            <a:pPr marL="342900" indent="-171450">
+              <a:buChar char="•"/>
+            </a:pPr>
+            <a:r>
+              <a:rPr lang="zh-CN" sz="2000">
+                <a:solidFill>
+                  <a:srgbClr val="374151"/>
+                </a:solidFill>
+                <a:latin typeface="Arial"/>
+                <a:ea typeface="Microsoft YaHei"/>
+              </a:rPr>
+              <a:t>待完成：ACS/Fed 真实外部数据尚未融合。</a:t>
+            </a:r>
+          </a:p>
+        </p:txBody>
+      </p:sp>
+    </p:spTree>
+  </p:cSld>
+  <p:clrMapOvr>
+    <a:masterClrMapping/>
+  </p:clrMapOvr>
+</p:sld>
+</file>
+
+<file path=ppt/slides/slide14.xml><?xml version="1.0" encoding="utf-8"?>
+<p:sld xmlns:a="http://schemas.openxmlformats.org/drawingml/2006/main" xmlns:r="http://schemas.openxmlformats.org/officeDocument/2006/relationships" xmlns:p="http://schemas.openxmlformats.org/presentationml/2006/main">
+  <p:cSld>
+    <p:spTree>
+      <p:nvGrpSpPr>
+        <p:cNvPr id="1" name=""/>
+        <p:cNvGrpSpPr/>
+        <p:nvPr/>
+      </p:nvGrpSpPr>
+      <p:grpSpPr>
+        <a:xfrm>
+          <a:off x="0" y="0"/>
+          <a:ext cx="0" cy="0"/>
+          <a:chOff x="0" y="0"/>
+          <a:chExt cx="0" cy="0"/>
+        </a:xfrm>
+      </p:grpSpPr>
+      <p:sp>
+        <p:nvSpPr>
+          <p:cNvPr id="2" name="TextBox 2"/>
+          <p:cNvSpPr txBox="1"/>
+          <p:nvPr/>
+        </p:nvSpPr>
+        <p:spPr>
+          <a:xfrm>
+            <a:off x="502920" y="292608"/>
+            <a:ext cx="11155680" cy="685800"/>
+          </a:xfrm>
+          <a:prstGeom prst="rect">
+            <a:avLst/>
+          </a:prstGeom>
+          <a:noFill/>
+        </p:spPr>
+        <p:txBody>
+          <a:bodyPr wrap="square"/>
+          <a:lstStyle/>
+          <a:p>
+            <a:r>
+              <a:rPr lang="zh-CN" sz="3000" b="1">
+                <a:solidFill>
+                  <a:srgbClr val="111827"/>
+                </a:solidFill>
+                <a:latin typeface="Arial"/>
+                <a:ea typeface="Microsoft YaHei"/>
+              </a:rPr>
+              <a:t>项目甘特图与当前节点</a:t>
+            </a:r>
+          </a:p>
+        </p:txBody>
+      </p:sp>
+      <p:sp>
+        <p:nvSpPr>
+          <p:cNvPr id="3" name="Bullets 3"/>
+          <p:cNvSpPr txBox="1"/>
+          <p:nvPr/>
+        </p:nvSpPr>
+        <p:spPr>
+          <a:xfrm>
+            <a:off x="685800" y="1143000"/>
+            <a:ext cx="10607040" cy="4389120"/>
+          </a:xfrm>
+          <a:prstGeom prst="rect">
+            <a:avLst/>
+          </a:prstGeom>
+          <a:noFill/>
+        </p:spPr>
+        <p:txBody>
+          <a:bodyPr wrap="square"/>
+          <a:lstStyle/>
+          <a:p>
+            <a:pPr marL="342900" indent="-171450">
+              <a:buChar char="•"/>
+            </a:pPr>
+            <a:r>
+              <a:rPr lang="zh-CN" sz="2000">
+                <a:solidFill>
+                  <a:srgbClr val="374151"/>
+                </a:solidFill>
+                <a:latin typeface="Arial"/>
+                <a:ea typeface="Microsoft YaHei"/>
+              </a:rPr>
+              <a:t>4/20–4/30：开题与问题定义 — 已完成。</a:t>
+            </a:r>
+          </a:p>
+          <a:p>
+            <a:pPr marL="342900" indent="-171450">
+              <a:buChar char="•"/>
+            </a:pPr>
+            <a:r>
+              <a:rPr lang="zh-CN" sz="2000">
+                <a:solidFill>
+                  <a:srgbClr val="374151"/>
+                </a:solidFill>
+                <a:latin typeface="Arial"/>
+                <a:ea typeface="Microsoft YaHei"/>
+              </a:rPr>
+              <a:t>5/15–5/18：项目仓库与数据说明 — 已完成。</a:t>
+            </a:r>
+          </a:p>
+          <a:p>
+            <a:pPr marL="342900" indent="-171450">
+              <a:buChar char="•"/>
+            </a:pPr>
+            <a:r>
+              <a:rPr lang="zh-CN" sz="2000">
+                <a:solidFill>
+                  <a:srgbClr val="374151"/>
+                </a:solidFill>
+                <a:latin typeface="Arial"/>
+                <a:ea typeface="Microsoft YaHei"/>
+              </a:rPr>
+              <a:t>5/18–5/19：Lending Club 下载与初步 EDA — 已完成，当前节点。</a:t>
+            </a:r>
+          </a:p>
+          <a:p>
+            <a:pPr marL="342900" indent="-171450">
+              <a:buChar char="•"/>
+            </a:pPr>
+            <a:r>
+              <a:rPr lang="zh-CN" sz="2000">
+                <a:solidFill>
+                  <a:srgbClr val="374151"/>
+                </a:solidFill>
+                <a:latin typeface="Arial"/>
+                <a:ea typeface="Microsoft YaHei"/>
+              </a:rPr>
+              <a:t>5/20–5/27：Home Credit / ACS / Fed 接入 — 进行中。</a:t>
+            </a:r>
+          </a:p>
+          <a:p>
+            <a:pPr marL="342900" indent="-171450">
+              <a:buChar char="•"/>
+            </a:pPr>
+            <a:r>
+              <a:rPr lang="zh-CN" sz="2000">
+                <a:solidFill>
+                  <a:srgbClr val="374151"/>
+                </a:solidFill>
+                <a:latin typeface="Arial"/>
+                <a:ea typeface="Microsoft YaHei"/>
+              </a:rPr>
+              <a:t>5/27–6/3：多源融合与对比分析 — 未开始。</a:t>
+            </a:r>
+          </a:p>
+          <a:p>
+            <a:pPr marL="342900" indent="-171450">
+              <a:buChar char="•"/>
+            </a:pPr>
+            <a:r>
+              <a:rPr lang="zh-CN" sz="2000">
+                <a:solidFill>
+                  <a:srgbClr val="374151"/>
+                </a:solidFill>
+                <a:latin typeface="Arial"/>
+                <a:ea typeface="Microsoft YaHei"/>
+              </a:rPr>
+              <a:t>6/3–6/17：最终可视化、报告、视频和提交 — 未开始。</a:t>
+            </a:r>
+          </a:p>
+        </p:txBody>
+      </p:sp>
+    </p:spTree>
+  </p:cSld>
+  <p:clrMapOvr>
+    <a:masterClrMapping/>
+  </p:clrMapOvr>
+</p:sld>
+</file>
+
+<file path=ppt/slides/slide15.xml><?xml version="1.0" encoding="utf-8"?>
+<p:sld xmlns:a="http://schemas.openxmlformats.org/drawingml/2006/main" xmlns:r="http://schemas.openxmlformats.org/officeDocument/2006/relationships" xmlns:p="http://schemas.openxmlformats.org/presentationml/2006/main">
+  <p:cSld>
+    <p:spTree>
+      <p:nvGrpSpPr>
+        <p:cNvPr id="1" name=""/>
+        <p:cNvGrpSpPr/>
+        <p:nvPr/>
+      </p:nvGrpSpPr>
+      <p:grpSpPr>
+        <a:xfrm>
+          <a:off x="0" y="0"/>
+          <a:ext cx="0" cy="0"/>
+          <a:chOff x="0" y="0"/>
+          <a:chExt cx="0" cy="0"/>
+        </a:xfrm>
+      </p:grpSpPr>
+      <p:sp>
+        <p:nvSpPr>
+          <p:cNvPr id="2" name="TextBox 2"/>
+          <p:cNvSpPr txBox="1"/>
+          <p:nvPr/>
+        </p:nvSpPr>
+        <p:spPr>
+          <a:xfrm>
+            <a:off x="502920" y="292608"/>
+            <a:ext cx="11155680" cy="685800"/>
+          </a:xfrm>
+          <a:prstGeom prst="rect">
+            <a:avLst/>
+          </a:prstGeom>
+          <a:noFill/>
+        </p:spPr>
+        <p:txBody>
+          <a:bodyPr wrap="square"/>
+          <a:lstStyle/>
+          <a:p>
+            <a:r>
+              <a:rPr lang="zh-CN" sz="3000" b="1">
+                <a:solidFill>
+                  <a:srgbClr val="111827"/>
+                </a:solidFill>
+                <a:latin typeface="Arial"/>
+                <a:ea typeface="Microsoft YaHei"/>
+              </a:rPr>
+              <a:t>后续计划</a:t>
+            </a:r>
+          </a:p>
+        </p:txBody>
+      </p:sp>
+      <p:sp>
+        <p:nvSpPr>
+          <p:cNvPr id="3" name="Bullets 3"/>
+          <p:cNvSpPr txBox="1"/>
+          <p:nvPr/>
+        </p:nvSpPr>
+        <p:spPr>
+          <a:xfrm>
+            <a:off x="685800" y="1143000"/>
+            <a:ext cx="10607040" cy="4389120"/>
+          </a:xfrm>
+          <a:prstGeom prst="rect">
+            <a:avLst/>
+          </a:prstGeom>
+          <a:noFill/>
+        </p:spPr>
+        <p:txBody>
+          <a:bodyPr wrap="square"/>
+          <a:lstStyle/>
+          <a:p>
+            <a:pPr marL="342900" indent="-171450">
+              <a:buChar char="•"/>
+            </a:pPr>
+            <a:r>
+              <a:rPr lang="zh-CN" sz="2000">
+                <a:solidFill>
+                  <a:srgbClr val="374151"/>
+                </a:solidFill>
+                <a:latin typeface="Arial"/>
+                <a:ea typeface="Microsoft YaHei"/>
+              </a:rPr>
+              <a:t>5/20–5/22：完成 Home Credit 授权下载；若仍失败，作为补充项。</a:t>
+            </a:r>
+          </a:p>
+          <a:p>
+            <a:pPr marL="342900" indent="-171450">
+              <a:buChar char="•"/>
+            </a:pPr>
+            <a:r>
+              <a:rPr lang="zh-CN" sz="2000">
+                <a:solidFill>
+                  <a:srgbClr val="374151"/>
+                </a:solidFill>
+                <a:latin typeface="Arial"/>
+                <a:ea typeface="Microsoft YaHei"/>
+              </a:rPr>
+              <a:t>5/22–5/27：下载 ACS/Fed 数据，统一州代码和年份/季度口径。</a:t>
+            </a:r>
+          </a:p>
+          <a:p>
+            <a:pPr marL="342900" indent="-171450">
+              <a:buChar char="•"/>
+            </a:pPr>
+            <a:r>
+              <a:rPr lang="zh-CN" sz="2000">
+                <a:solidFill>
+                  <a:srgbClr val="374151"/>
+                </a:solidFill>
+                <a:latin typeface="Arial"/>
+                <a:ea typeface="Microsoft YaHei"/>
+              </a:rPr>
+              <a:t>5/27–6/3：Lending Club 与 ACS/Fed 做州级、时间级融合。</a:t>
+            </a:r>
+          </a:p>
+          <a:p>
+            <a:pPr marL="342900" indent="-171450">
+              <a:buChar char="•"/>
+            </a:pPr>
+            <a:r>
+              <a:rPr lang="zh-CN" sz="2000">
+                <a:solidFill>
+                  <a:srgbClr val="374151"/>
+                </a:solidFill>
+                <a:latin typeface="Arial"/>
+                <a:ea typeface="Microsoft YaHei"/>
+              </a:rPr>
+              <a:t>6/3–6/8：完成最终可视化、核心结论和报告初稿。</a:t>
+            </a:r>
+          </a:p>
+          <a:p>
+            <a:pPr marL="342900" indent="-171450">
+              <a:buChar char="•"/>
+            </a:pPr>
+            <a:r>
+              <a:rPr lang="zh-CN" sz="2000">
+                <a:solidFill>
+                  <a:srgbClr val="374151"/>
+                </a:solidFill>
+                <a:latin typeface="Arial"/>
+                <a:ea typeface="Microsoft YaHei"/>
+              </a:rPr>
+              <a:t>6/8–6/17：打磨最终 PPT、报告、视频和代码仓库。</a:t>
+            </a:r>
+          </a:p>
+        </p:txBody>
+      </p:sp>
+    </p:spTree>
+  </p:cSld>
+  <p:clrMapOvr>
+    <a:masterClrMapping/>
+  </p:clrMapOvr>
+</p:sld>
+</file>
+
+<file path=ppt/slides/slide16.xml><?xml version="1.0" encoding="utf-8"?>
+<p:sld xmlns:a="http://schemas.openxmlformats.org/drawingml/2006/main" xmlns:r="http://schemas.openxmlformats.org/officeDocument/2006/relationships" xmlns:p="http://schemas.openxmlformats.org/presentationml/2006/main">
+  <p:cSld>
+    <p:spTree>
+      <p:nvGrpSpPr>
+        <p:cNvPr id="1" name=""/>
+        <p:cNvGrpSpPr/>
+        <p:nvPr/>
+      </p:nvGrpSpPr>
+      <p:grpSpPr>
+        <a:xfrm>
+          <a:off x="0" y="0"/>
+          <a:ext cx="0" cy="0"/>
+          <a:chOff x="0" y="0"/>
+          <a:chExt cx="0" cy="0"/>
+        </a:xfrm>
+      </p:grpSpPr>
+      <p:sp>
+        <p:nvSpPr>
+          <p:cNvPr id="2" name="TextBox 2"/>
+          <p:cNvSpPr txBox="1"/>
+          <p:nvPr/>
+        </p:nvSpPr>
+        <p:spPr>
+          <a:xfrm>
+            <a:off x="502920" y="292608"/>
+            <a:ext cx="11155680" cy="685800"/>
+          </a:xfrm>
+          <a:prstGeom prst="rect">
+            <a:avLst/>
+          </a:prstGeom>
+          <a:noFill/>
+        </p:spPr>
+        <p:txBody>
+          <a:bodyPr wrap="square"/>
+          <a:lstStyle/>
+          <a:p>
+            <a:r>
+              <a:rPr lang="zh-CN" sz="3000" b="1">
+                <a:solidFill>
+                  <a:srgbClr val="111827"/>
+                </a:solidFill>
+                <a:latin typeface="Arial"/>
+                <a:ea typeface="Microsoft YaHei"/>
+              </a:rPr>
+              <a:t>风险与备选方案</a:t>
+            </a:r>
+          </a:p>
+        </p:txBody>
+      </p:sp>
+      <p:sp>
+        <p:nvSpPr>
+          <p:cNvPr id="3" name="Bullets 3"/>
+          <p:cNvSpPr txBox="1"/>
+          <p:nvPr/>
+        </p:nvSpPr>
+        <p:spPr>
+          <a:xfrm>
+            <a:off x="685800" y="1143000"/>
+            <a:ext cx="10607040" cy="4389120"/>
+          </a:xfrm>
+          <a:prstGeom prst="rect">
+            <a:avLst/>
+          </a:prstGeom>
+          <a:noFill/>
+        </p:spPr>
+        <p:txBody>
+          <a:bodyPr wrap="square"/>
+          <a:lstStyle/>
+          <a:p>
+            <a:pPr marL="342900" indent="-171450">
+              <a:buChar char="•"/>
+            </a:pPr>
+            <a:r>
+              <a:rPr lang="zh-CN" sz="2000">
+                <a:solidFill>
+                  <a:srgbClr val="374151"/>
+                </a:solidFill>
+                <a:latin typeface="Arial"/>
+                <a:ea typeface="Microsoft YaHei"/>
+              </a:rPr>
+              <a:t>Home Credit 需网页授权：先以 Lending Club + ACS + Fed 完成主线。</a:t>
+            </a:r>
+          </a:p>
+          <a:p>
+            <a:pPr marL="342900" indent="-171450">
+              <a:buChar char="•"/>
+            </a:pPr>
+            <a:r>
+              <a:rPr lang="zh-CN" sz="2000">
+                <a:solidFill>
+                  <a:srgbClr val="374151"/>
+                </a:solidFill>
+                <a:latin typeface="Arial"/>
+                <a:ea typeface="Microsoft YaHei"/>
+              </a:rPr>
+              <a:t>ACS/Fed 粒度不一致：降到州级、年度/季度级对齐。</a:t>
+            </a:r>
+          </a:p>
+          <a:p>
+            <a:pPr marL="342900" indent="-171450">
+              <a:buChar char="•"/>
+            </a:pPr>
+            <a:r>
+              <a:rPr lang="zh-CN" sz="2000">
+                <a:solidFill>
+                  <a:srgbClr val="374151"/>
+                </a:solidFill>
+                <a:latin typeface="Arial"/>
+                <a:ea typeface="Microsoft YaHei"/>
+              </a:rPr>
+              <a:t>本地处理大文件慢：继续使用流式 CSV 统计和抽样分析。</a:t>
+            </a:r>
+          </a:p>
+          <a:p>
+            <a:pPr marL="342900" indent="-171450">
+              <a:buChar char="•"/>
+            </a:pPr>
+            <a:r>
+              <a:rPr lang="zh-CN" sz="2000">
+                <a:solidFill>
+                  <a:srgbClr val="374151"/>
+                </a:solidFill>
+                <a:latin typeface="Arial"/>
+                <a:ea typeface="Microsoft YaHei"/>
+              </a:rPr>
+              <a:t>多源变量提升不明显：强调解释性洞察，报告变量边际贡献和局限。</a:t>
+            </a:r>
+          </a:p>
+        </p:txBody>
+      </p:sp>
+    </p:spTree>
+  </p:cSld>
+  <p:clrMapOvr>
+    <a:masterClrMapping/>
+  </p:clrMapOvr>
+</p:sld>
+</file>
+
+<file path=ppt/slides/slide17.xml><?xml version="1.0" encoding="utf-8"?>
+<p:sld xmlns:a="http://schemas.openxmlformats.org/drawingml/2006/main" xmlns:r="http://schemas.openxmlformats.org/officeDocument/2006/relationships" xmlns:p="http://schemas.openxmlformats.org/presentationml/2006/main">
+  <p:cSld>
+    <p:spTree>
+      <p:nvGrpSpPr>
+        <p:cNvPr id="1" name=""/>
+        <p:cNvGrpSpPr/>
+        <p:nvPr/>
+      </p:nvGrpSpPr>
+      <p:grpSpPr>
+        <a:xfrm>
+          <a:off x="0" y="0"/>
+          <a:ext cx="0" cy="0"/>
+          <a:chOff x="0" y="0"/>
+          <a:chExt cx="0" cy="0"/>
+        </a:xfrm>
+      </p:grpSpPr>
+      <p:sp>
+        <p:nvSpPr>
+          <p:cNvPr id="2" name="TextBox 2"/>
+          <p:cNvSpPr txBox="1"/>
+          <p:nvPr/>
+        </p:nvSpPr>
+        <p:spPr>
+          <a:xfrm>
+            <a:off x="502920" y="292608"/>
+            <a:ext cx="11155680" cy="685800"/>
+          </a:xfrm>
+          <a:prstGeom prst="rect">
+            <a:avLst/>
+          </a:prstGeom>
+          <a:noFill/>
+        </p:spPr>
+        <p:txBody>
+          <a:bodyPr wrap="square"/>
+          <a:lstStyle/>
+          <a:p>
+            <a:r>
+              <a:rPr lang="zh-CN" sz="3000" b="1">
+                <a:solidFill>
+                  <a:srgbClr val="111827"/>
+                </a:solidFill>
+                <a:latin typeface="Arial"/>
+                <a:ea typeface="Microsoft YaHei"/>
+              </a:rPr>
+              <a:t>总结</a:t>
+            </a:r>
+          </a:p>
+        </p:txBody>
+      </p:sp>
+      <p:sp>
+        <p:nvSpPr>
+          <p:cNvPr id="3" name="Bullets 3"/>
+          <p:cNvSpPr txBox="1"/>
+          <p:nvPr/>
+        </p:nvSpPr>
+        <p:spPr>
+          <a:xfrm>
+            <a:off x="685800" y="1143000"/>
+            <a:ext cx="10607040" cy="4389120"/>
+          </a:xfrm>
+          <a:prstGeom prst="rect">
+            <a:avLst/>
+          </a:prstGeom>
+          <a:noFill/>
+        </p:spPr>
+        <p:txBody>
+          <a:bodyPr wrap="square"/>
+          <a:lstStyle/>
+          <a:p>
+            <a:pPr marL="342900" indent="-171450">
+              <a:buChar char="•"/>
+            </a:pPr>
+            <a:r>
+              <a:rPr lang="zh-CN" sz="2000">
+                <a:solidFill>
+                  <a:srgbClr val="374151"/>
+                </a:solidFill>
+                <a:latin typeface="Arial"/>
+                <a:ea typeface="Microsoft YaHei"/>
+              </a:rPr>
+              <a:t>中期阶段已经完成真实 Lending Club 数据分析。</a:t>
+            </a:r>
+          </a:p>
+          <a:p>
+            <a:pPr marL="342900" indent="-171450">
+              <a:buChar char="•"/>
+            </a:pPr>
+            <a:r>
+              <a:rPr lang="zh-CN" sz="2000">
+                <a:solidFill>
+                  <a:srgbClr val="374151"/>
+                </a:solidFill>
+                <a:latin typeface="Arial"/>
+                <a:ea typeface="Microsoft YaHei"/>
+              </a:rPr>
+              <a:t>当前已有可复现代码、GitHub 仓库、统计表和真实图表。</a:t>
+            </a:r>
+          </a:p>
+          <a:p>
+            <a:pPr marL="342900" indent="-171450">
+              <a:buChar char="•"/>
+            </a:pPr>
+            <a:r>
+              <a:rPr lang="zh-CN" sz="2000">
+                <a:solidFill>
+                  <a:srgbClr val="374151"/>
+                </a:solidFill>
+                <a:latin typeface="Arial"/>
+                <a:ea typeface="Microsoft YaHei"/>
+              </a:rPr>
+              <a:t>核心初步结论：等级、利率、FICO、地区都与违约风险存在显著关联。</a:t>
+            </a:r>
+          </a:p>
+          <a:p>
+            <a:pPr marL="342900" indent="-171450">
+              <a:buChar char="•"/>
+            </a:pPr>
+            <a:r>
+              <a:rPr lang="zh-CN" sz="2000">
+                <a:solidFill>
+                  <a:srgbClr val="374151"/>
+                </a:solidFill>
+                <a:latin typeface="Arial"/>
+                <a:ea typeface="Microsoft YaHei"/>
+              </a:rPr>
+              <a:t>下一阶段重点：接入 ACS/Fed，解释地区和宏观环境如何影响违约风险。</a:t>
             </a:r>
           </a:p>
         </p:txBody>
@@ -807,7 +1411,7 @@
                 <a:latin typeface="Arial"/>
                 <a:ea typeface="Microsoft YaHei"/>
               </a:rPr>
-              <a:t>研究动机：为什么需要多源风险检测</a:t>
+              <a:t>研究动机：贷款违约不只是个人问题</a:t>
             </a:r>
           </a:p>
         </p:txBody>
@@ -858,22 +1462,22 @@
                 <a:latin typeface="Arial"/>
                 <a:ea typeface="Microsoft YaHei"/>
               </a:rPr>
-              <a:t>传统信用评估主要依赖个人信用与贷款记录，容易忽略环境因素。</a:t>
-            </a:r>
-          </a:p>
-          <a:p>
-            <a:pPr marL="342900" indent="-171450">
-              <a:buChar char="•"/>
-            </a:pPr>
-            <a:r>
-              <a:rPr lang="zh-CN" sz="2000">
-                <a:solidFill>
-                  <a:srgbClr val="374151"/>
-                </a:solidFill>
-                <a:latin typeface="Arial"/>
-                <a:ea typeface="Microsoft YaHei"/>
-              </a:rPr>
-              <a:t>核心观点：违约风险不仅由个人决定，也受到地区经济与宏观金融周期影响。</a:t>
+              <a:t>同样收入和信用等级的人，在不同地区经济环境、利率周期下可能有不同违约概率。</a:t>
+            </a:r>
+          </a:p>
+          <a:p>
+            <a:pPr marL="342900" indent="-171450">
+              <a:buChar char="•"/>
+            </a:pPr>
+            <a:r>
+              <a:rPr lang="zh-CN" sz="2000">
+                <a:solidFill>
+                  <a:srgbClr val="374151"/>
+                </a:solidFill>
+                <a:latin typeface="Arial"/>
+                <a:ea typeface="Microsoft YaHei"/>
+              </a:rPr>
+              <a:t>核心问题：能否用个人信贷 + 地区经济 + 宏观金融数据，形成更可靠、更可解释的风险洞察？</a:t>
             </a:r>
           </a:p>
         </p:txBody>
@@ -931,7 +1535,7 @@
                 <a:latin typeface="Arial"/>
                 <a:ea typeface="Microsoft YaHei"/>
               </a:rPr>
-              <a:t>研究问题</a:t>
+              <a:t>项目挑战：真实金融数据为什么难</a:t>
             </a:r>
           </a:p>
         </p:txBody>
@@ -967,37 +1571,52 @@
                 <a:latin typeface="Arial"/>
                 <a:ea typeface="Microsoft YaHei"/>
               </a:rPr>
-              <a:t>如何整合个人信贷、地区经济与宏观金融数据？</a:t>
-            </a:r>
-          </a:p>
-          <a:p>
-            <a:pPr marL="342900" indent="-171450">
-              <a:buChar char="•"/>
-            </a:pPr>
-            <a:r>
-              <a:rPr lang="zh-CN" sz="2000">
-                <a:solidFill>
-                  <a:srgbClr val="374151"/>
-                </a:solidFill>
-                <a:latin typeface="Arial"/>
-                <a:ea typeface="Microsoft YaHei"/>
-              </a:rPr>
-              <a:t>如何解决多源异构数据在时间和空间粒度上的对齐问题？</a:t>
-            </a:r>
-          </a:p>
-          <a:p>
-            <a:pPr marL="342900" indent="-171450">
-              <a:buChar char="•"/>
-            </a:pPr>
-            <a:r>
-              <a:rPr lang="zh-CN" sz="2000">
-                <a:solidFill>
-                  <a:srgbClr val="374151"/>
-                </a:solidFill>
-                <a:latin typeface="Arial"/>
-                <a:ea typeface="Microsoft YaHei"/>
-              </a:rPr>
-              <a:t>多源变量是否能提供比单一贷款数据更可靠、更可解释的风险洞察？</a:t>
+              <a:t>数据规模大：Lending Club accepted 数据 2,260,701 条、151 个字段。</a:t>
+            </a:r>
+          </a:p>
+          <a:p>
+            <a:pPr marL="342900" indent="-171450">
+              <a:buChar char="•"/>
+            </a:pPr>
+            <a:r>
+              <a:rPr lang="zh-CN" sz="2000">
+                <a:solidFill>
+                  <a:srgbClr val="374151"/>
+                </a:solidFill>
+                <a:latin typeface="Arial"/>
+                <a:ea typeface="Microsoft YaHei"/>
+              </a:rPr>
+              <a:t>标签复杂：Current 等未完结贷款不能简单视为不违约。</a:t>
+            </a:r>
+          </a:p>
+          <a:p>
+            <a:pPr marL="342900" indent="-171450">
+              <a:buChar char="•"/>
+            </a:pPr>
+            <a:r>
+              <a:rPr lang="zh-CN" sz="2000">
+                <a:solidFill>
+                  <a:srgbClr val="374151"/>
+                </a:solidFill>
+                <a:latin typeface="Arial"/>
+                <a:ea typeface="Microsoft YaHei"/>
+              </a:rPr>
+              <a:t>多源融合难：贷款是个人/时间粒度，ACS 是地区粒度，Fed 是宏观时间序列。</a:t>
+            </a:r>
+          </a:p>
+          <a:p>
+            <a:pPr marL="342900" indent="-171450">
+              <a:buChar char="•"/>
+            </a:pPr>
+            <a:r>
+              <a:rPr lang="zh-CN" sz="2000">
+                <a:solidFill>
+                  <a:srgbClr val="374151"/>
+                </a:solidFill>
+                <a:latin typeface="Arial"/>
+                <a:ea typeface="Microsoft YaHei"/>
+              </a:rPr>
+              <a:t>解释性要求高：不仅要算出结果，还要讲清楚为什么。</a:t>
             </a:r>
           </a:p>
         </p:txBody>
@@ -1055,7 +1674,7 @@
                 <a:latin typeface="Arial"/>
                 <a:ea typeface="Microsoft YaHei"/>
               </a:rPr>
-              <a:t>相关工作与项目定位</a:t>
+              <a:t>相关工作与局限</a:t>
             </a:r>
           </a:p>
         </p:txBody>
@@ -1091,37 +1710,52 @@
                 <a:latin typeface="Arial"/>
                 <a:ea typeface="Microsoft YaHei"/>
               </a:rPr>
-              <a:t>传统信用评分关注 FICO、收入、负债率和信用历史。</a:t>
-            </a:r>
-          </a:p>
-          <a:p>
-            <a:pPr marL="342900" indent="-171450">
-              <a:buChar char="•"/>
-            </a:pPr>
-            <a:r>
-              <a:rPr lang="zh-CN" sz="2000">
-                <a:solidFill>
-                  <a:srgbClr val="374151"/>
-                </a:solidFill>
-                <a:latin typeface="Arial"/>
-                <a:ea typeface="Microsoft YaHei"/>
-              </a:rPr>
-              <a:t>机器学习违约预测强调分类效果，但解释性和数据来源常被弱化。</a:t>
-            </a:r>
-          </a:p>
-          <a:p>
-            <a:pPr marL="342900" indent="-171450">
-              <a:buChar char="•"/>
-            </a:pPr>
-            <a:r>
-              <a:rPr lang="zh-CN" sz="2000">
-                <a:solidFill>
-                  <a:srgbClr val="374151"/>
-                </a:solidFill>
-                <a:latin typeface="Arial"/>
-                <a:ea typeface="Microsoft YaHei"/>
-              </a:rPr>
-              <a:t>本项目重点展示真实数据获取、清洗、融合、统计分析和可解释洞察。</a:t>
+              <a:t>传统信用评分：FICO、收入、负债率，解释性强但偏重个体信息。</a:t>
+            </a:r>
+          </a:p>
+          <a:p>
+            <a:pPr marL="342900" indent="-171450">
+              <a:buChar char="•"/>
+            </a:pPr>
+            <a:r>
+              <a:rPr lang="zh-CN" sz="2000">
+                <a:solidFill>
+                  <a:srgbClr val="374151"/>
+                </a:solidFill>
+                <a:latin typeface="Arial"/>
+                <a:ea typeface="Microsoft YaHei"/>
+              </a:rPr>
+              <a:t>机器学习违约预测：Logistic Regression、Random Forest、XGBoost，预测强但容易黑盒化。</a:t>
+            </a:r>
+          </a:p>
+          <a:p>
+            <a:pPr marL="342900" indent="-171450">
+              <a:buChar char="•"/>
+            </a:pPr>
+            <a:r>
+              <a:rPr lang="zh-CN" sz="2000">
+                <a:solidFill>
+                  <a:srgbClr val="374151"/>
+                </a:solidFill>
+                <a:latin typeface="Arial"/>
+                <a:ea typeface="Microsoft YaHei"/>
+              </a:rPr>
+              <a:t>多源金融风险分析：加入地区收入、失业率、利率、通胀，但数据对齐和口径一致性困难。</a:t>
+            </a:r>
+          </a:p>
+          <a:p>
+            <a:pPr marL="342900" indent="-171450">
+              <a:buChar char="•"/>
+            </a:pPr>
+            <a:r>
+              <a:rPr lang="zh-CN" sz="2000">
+                <a:solidFill>
+                  <a:srgbClr val="374151"/>
+                </a:solidFill>
+                <a:latin typeface="Arial"/>
+                <a:ea typeface="Microsoft YaHei"/>
+              </a:rPr>
+              <a:t>本项目定位：先完成真实数据清洗、融合、统计分析和可解释洞察。</a:t>
             </a:r>
           </a:p>
         </p:txBody>
@@ -1179,7 +1813,7 @@
                 <a:latin typeface="Arial"/>
                 <a:ea typeface="Microsoft YaHei"/>
               </a:rPr>
-              <a:t>数据集与当前状态</a:t>
+              <a:t>数据集与中期状态</a:t>
             </a:r>
           </a:p>
         </p:txBody>
@@ -1215,67 +1849,52 @@
                 <a:latin typeface="Arial"/>
                 <a:ea typeface="Microsoft YaHei"/>
               </a:rPr>
-              <a:t>Lending Club：贷款状态、等级、利率、收入、州、发放时间；待手动下载。</a:t>
-            </a:r>
-          </a:p>
-          <a:p>
-            <a:pPr marL="342900" indent="-171450">
-              <a:buChar char="•"/>
-            </a:pPr>
-            <a:r>
-              <a:rPr lang="zh-CN" sz="2000">
-                <a:solidFill>
-                  <a:srgbClr val="374151"/>
-                </a:solidFill>
-                <a:latin typeface="Arial"/>
-                <a:ea typeface="Microsoft YaHei"/>
-              </a:rPr>
-              <a:t>Home Credit：信贷申请人与历史特征；作为补充对照数据。</a:t>
-            </a:r>
-          </a:p>
-          <a:p>
-            <a:pPr marL="342900" indent="-171450">
-              <a:buChar char="•"/>
-            </a:pPr>
-            <a:r>
-              <a:rPr lang="zh-CN" sz="2000">
-                <a:solidFill>
-                  <a:srgbClr val="374151"/>
-                </a:solidFill>
-                <a:latin typeface="Arial"/>
-                <a:ea typeface="Microsoft YaHei"/>
-              </a:rPr>
-              <a:t>ACS：州/县级收入、贫困率、就业等区域变量。</a:t>
-            </a:r>
-          </a:p>
-          <a:p>
-            <a:pPr marL="342900" indent="-171450">
-              <a:buChar char="•"/>
-            </a:pPr>
-            <a:r>
-              <a:rPr lang="zh-CN" sz="2000">
-                <a:solidFill>
-                  <a:srgbClr val="374151"/>
-                </a:solidFill>
-                <a:latin typeface="Arial"/>
-                <a:ea typeface="Microsoft YaHei"/>
-              </a:rPr>
-              <a:t>Fed：利率、通胀等宏观变量。</a:t>
-            </a:r>
-          </a:p>
-          <a:p>
-            <a:pPr marL="342900" indent="-171450">
-              <a:buChar char="•"/>
-            </a:pPr>
-            <a:r>
-              <a:rPr lang="zh-CN" sz="2000">
-                <a:solidFill>
-                  <a:srgbClr val="374151"/>
-                </a:solidFill>
-                <a:latin typeface="Arial"/>
-                <a:ea typeface="Microsoft YaHei"/>
-              </a:rPr>
-              <a:t>中期已完成脚本接入约定和样例多源流程。</a:t>
+              <a:t>Lending Club：已下载并完成真实数据初步分析。</a:t>
+            </a:r>
+          </a:p>
+          <a:p>
+            <a:pPr marL="342900" indent="-171450">
+              <a:buChar char="•"/>
+            </a:pPr>
+            <a:r>
+              <a:rPr lang="zh-CN" sz="2000">
+                <a:solidFill>
+                  <a:srgbClr val="374151"/>
+                </a:solidFill>
+                <a:latin typeface="Arial"/>
+                <a:ea typeface="Microsoft YaHei"/>
+              </a:rPr>
+              <a:t>Home Credit：Kaggle competition 需网页端接受 rules 后继续下载。</a:t>
+            </a:r>
+          </a:p>
+          <a:p>
+            <a:pPr marL="342900" indent="-171450">
+              <a:buChar char="•"/>
+            </a:pPr>
+            <a:r>
+              <a:rPr lang="zh-CN" sz="2000">
+                <a:solidFill>
+                  <a:srgbClr val="374151"/>
+                </a:solidFill>
+                <a:latin typeface="Arial"/>
+                <a:ea typeface="Microsoft YaHei"/>
+              </a:rPr>
+              <a:t>ACS 区域经济数据：下一阶段接入州/县级收入、贫困率、就业等变量。</a:t>
+            </a:r>
+          </a:p>
+          <a:p>
+            <a:pPr marL="342900" indent="-171450">
+              <a:buChar char="•"/>
+            </a:pPr>
+            <a:r>
+              <a:rPr lang="zh-CN" sz="2000">
+                <a:solidFill>
+                  <a:srgbClr val="374151"/>
+                </a:solidFill>
+                <a:latin typeface="Arial"/>
+                <a:ea typeface="Microsoft YaHei"/>
+              </a:rPr>
+              <a:t>Fed 宏观金融数据：下一阶段接入利率、通胀、失业率等变量。</a:t>
             </a:r>
           </a:p>
         </p:txBody>
@@ -1369,67 +1988,67 @@
                 <a:latin typeface="Arial"/>
                 <a:ea typeface="Microsoft YaHei"/>
               </a:rPr>
-              <a:t>数据获取：Kaggle 手动下载，ACS/Fed 外部数据后续接入。</a:t>
-            </a:r>
-          </a:p>
-          <a:p>
-            <a:pPr marL="342900" indent="-171450">
-              <a:buChar char="•"/>
-            </a:pPr>
-            <a:r>
-              <a:rPr lang="zh-CN" sz="2000">
-                <a:solidFill>
-                  <a:srgbClr val="374151"/>
-                </a:solidFill>
-                <a:latin typeface="Arial"/>
-                <a:ea typeface="Microsoft YaHei"/>
-              </a:rPr>
-              <a:t>数据探索：规模、字段、缺失值、标签分布。</a:t>
-            </a:r>
-          </a:p>
-          <a:p>
-            <a:pPr marL="342900" indent="-171450">
-              <a:buChar char="•"/>
-            </a:pPr>
-            <a:r>
-              <a:rPr lang="zh-CN" sz="2000">
-                <a:solidFill>
-                  <a:srgbClr val="374151"/>
-                </a:solidFill>
-                <a:latin typeface="Arial"/>
-                <a:ea typeface="Microsoft YaHei"/>
-              </a:rPr>
-              <a:t>数据清洗：字段标准化、缺失值统计、异常值检查。</a:t>
-            </a:r>
-          </a:p>
-          <a:p>
-            <a:pPr marL="342900" indent="-171450">
-              <a:buChar char="•"/>
-            </a:pPr>
-            <a:r>
-              <a:rPr lang="zh-CN" sz="2000">
-                <a:solidFill>
-                  <a:srgbClr val="374151"/>
-                </a:solidFill>
-                <a:latin typeface="Arial"/>
-                <a:ea typeface="Microsoft YaHei"/>
-              </a:rPr>
-              <a:t>多源融合：按州连接区域经济数据，按年份连接宏观数据。</a:t>
-            </a:r>
-          </a:p>
-          <a:p>
-            <a:pPr marL="342900" indent="-171450">
-              <a:buChar char="•"/>
-            </a:pPr>
-            <a:r>
-              <a:rPr lang="zh-CN" sz="2000">
-                <a:solidFill>
-                  <a:srgbClr val="374151"/>
-                </a:solidFill>
-                <a:latin typeface="Arial"/>
-                <a:ea typeface="Microsoft YaHei"/>
-              </a:rPr>
-              <a:t>SQL 聚合与可视化：输出表格和 PNG 图表。</a:t>
+              <a:t>Kaggle 原始数据下载到 data/raw，不上传 GitHub。</a:t>
+            </a:r>
+          </a:p>
+          <a:p>
+            <a:pPr marL="342900" indent="-171450">
+              <a:buChar char="•"/>
+            </a:pPr>
+            <a:r>
+              <a:rPr lang="zh-CN" sz="2000">
+                <a:solidFill>
+                  <a:srgbClr val="374151"/>
+                </a:solidFill>
+                <a:latin typeface="Arial"/>
+                <a:ea typeface="Microsoft YaHei"/>
+              </a:rPr>
+              <a:t>字段检查与缺失率统计。</a:t>
+            </a:r>
+          </a:p>
+          <a:p>
+            <a:pPr marL="342900" indent="-171450">
+              <a:buChar char="•"/>
+            </a:pPr>
+            <a:r>
+              <a:rPr lang="zh-CN" sz="2000">
+                <a:solidFill>
+                  <a:srgbClr val="374151"/>
+                </a:solidFill>
+                <a:latin typeface="Arial"/>
+                <a:ea typeface="Microsoft YaHei"/>
+              </a:rPr>
+              <a:t>贷款状态过滤：保留 Fully Paid / Charged Off / Default 等可判断最终结果的状态。</a:t>
+            </a:r>
+          </a:p>
+          <a:p>
+            <a:pPr marL="342900" indent="-171450">
+              <a:buChar char="•"/>
+            </a:pPr>
+            <a:r>
+              <a:rPr lang="zh-CN" sz="2000">
+                <a:solidFill>
+                  <a:srgbClr val="374151"/>
+                </a:solidFill>
+                <a:latin typeface="Arial"/>
+                <a:ea typeface="Microsoft YaHei"/>
+              </a:rPr>
+              <a:t>按等级、年份、州、利率、收入、DTI、FICO 聚合违约率。</a:t>
+            </a:r>
+          </a:p>
+          <a:p>
+            <a:pPr marL="342900" indent="-171450">
+              <a:buChar char="•"/>
+            </a:pPr>
+            <a:r>
+              <a:rPr lang="zh-CN" sz="2000">
+                <a:solidFill>
+                  <a:srgbClr val="374151"/>
+                </a:solidFill>
+                <a:latin typeface="Arial"/>
+                <a:ea typeface="Microsoft YaHei"/>
+              </a:rPr>
+              <a:t>输出 CSV 统计表与 PNG 图表，下一阶段接入 ACS/Fed。</a:t>
             </a:r>
           </a:p>
         </p:txBody>
@@ -1487,7 +2106,7 @@
                 <a:latin typeface="Arial"/>
                 <a:ea typeface="Microsoft YaHei"/>
               </a:rPr>
-              <a:t>当前进度</a:t>
+              <a:t>当前进度：已经从框架推进到真实数据</a:t>
             </a:r>
           </a:p>
         </p:txBody>
@@ -1523,67 +2142,67 @@
                 <a:latin typeface="Arial"/>
                 <a:ea typeface="Microsoft YaHei"/>
               </a:rPr>
-              <a:t>已建立可提交代码库结构和 README。</a:t>
-            </a:r>
-          </a:p>
-          <a:p>
-            <a:pPr marL="342900" indent="-171450">
-              <a:buChar char="•"/>
-            </a:pPr>
-            <a:r>
-              <a:rPr lang="zh-CN" sz="2000">
-                <a:solidFill>
-                  <a:srgbClr val="374151"/>
-                </a:solidFill>
-                <a:latin typeface="Arial"/>
-                <a:ea typeface="Microsoft YaHei"/>
-              </a:rPr>
-              <a:t>已提供 Kaggle 数据放置说明。</a:t>
-            </a:r>
-          </a:p>
-          <a:p>
-            <a:pPr marL="342900" indent="-171450">
-              <a:buChar char="•"/>
-            </a:pPr>
-            <a:r>
-              <a:rPr lang="zh-CN" sz="2000">
-                <a:solidFill>
-                  <a:srgbClr val="374151"/>
-                </a:solidFill>
-                <a:latin typeface="Arial"/>
-                <a:ea typeface="Microsoft YaHei"/>
-              </a:rPr>
-              <a:t>已实现 src/run_midterm_pipeline.py。</a:t>
-            </a:r>
-          </a:p>
-          <a:p>
-            <a:pPr marL="342900" indent="-171450">
-              <a:buChar char="•"/>
-            </a:pPr>
-            <a:r>
-              <a:rPr lang="zh-CN" sz="2000">
-                <a:solidFill>
-                  <a:srgbClr val="374151"/>
-                </a:solidFill>
-                <a:latin typeface="Arial"/>
-                <a:ea typeface="Microsoft YaHei"/>
-              </a:rPr>
-              <a:t>无 Kaggle 数据时仍可生成样例融合数据、统计表和图表。</a:t>
-            </a:r>
-          </a:p>
-          <a:p>
-            <a:pPr marL="342900" indent="-171450">
-              <a:buChar char="•"/>
-            </a:pPr>
-            <a:r>
-              <a:rPr lang="zh-CN" sz="2000">
-                <a:solidFill>
-                  <a:srgbClr val="374151"/>
-                </a:solidFill>
-                <a:latin typeface="Arial"/>
-                <a:ea typeface="Microsoft YaHei"/>
-              </a:rPr>
-              <a:t>放入贷款 CSV 后可自动生成贷款概览、缺失率和标签分布。</a:t>
+              <a:t>GitHub 仓库、README、数据说明和运行脚本已完成。</a:t>
+            </a:r>
+          </a:p>
+          <a:p>
+            <a:pPr marL="342900" indent="-171450">
+              <a:buChar char="•"/>
+            </a:pPr>
+            <a:r>
+              <a:rPr lang="zh-CN" sz="2000">
+                <a:solidFill>
+                  <a:srgbClr val="374151"/>
+                </a:solidFill>
+                <a:latin typeface="Arial"/>
+                <a:ea typeface="Microsoft YaHei"/>
+              </a:rPr>
+              <a:t>已读取 2,260,701 条 Lending Club accepted 贷款记录。</a:t>
+            </a:r>
+          </a:p>
+          <a:p>
+            <a:pPr marL="342900" indent="-171450">
+              <a:buChar char="•"/>
+            </a:pPr>
+            <a:r>
+              <a:rPr lang="zh-CN" sz="2000">
+                <a:solidFill>
+                  <a:srgbClr val="374151"/>
+                </a:solidFill>
+                <a:latin typeface="Arial"/>
+                <a:ea typeface="Microsoft YaHei"/>
+              </a:rPr>
+              <a:t>筛选 1,367,578 条已完结记录用于违约率统计。</a:t>
+            </a:r>
+          </a:p>
+          <a:p>
+            <a:pPr marL="342900" indent="-171450">
+              <a:buChar char="•"/>
+            </a:pPr>
+            <a:r>
+              <a:rPr lang="zh-CN" sz="2000">
+                <a:solidFill>
+                  <a:srgbClr val="374151"/>
+                </a:solidFill>
+                <a:latin typeface="Arial"/>
+                <a:ea typeface="Microsoft YaHei"/>
+              </a:rPr>
+              <a:t>已生成真实统计表和图表：等级、利率、FICO、年份、州。</a:t>
+            </a:r>
+          </a:p>
+          <a:p>
+            <a:pPr marL="342900" indent="-171450">
+              <a:buChar char="•"/>
+            </a:pPr>
+            <a:r>
+              <a:rPr lang="zh-CN" sz="2000">
+                <a:solidFill>
+                  <a:srgbClr val="374151"/>
+                </a:solidFill>
+                <a:latin typeface="Arial"/>
+                <a:ea typeface="Microsoft YaHei"/>
+              </a:rPr>
+              <a:t>当前节点：完成单一真实信贷数据源分析，下一步进入多源融合。</a:t>
             </a:r>
           </a:p>
         </p:txBody>
@@ -1641,7 +2260,7 @@
                 <a:latin typeface="Arial"/>
                 <a:ea typeface="Microsoft YaHei"/>
               </a:rPr>
-              <a:t>样例结果：贷款等级与违约率</a:t>
+              <a:t>真实发现 1：贷款等级与违约率</a:t>
             </a:r>
           </a:p>
         </p:txBody>
@@ -1677,37 +2296,52 @@
                 <a:latin typeface="Arial"/>
                 <a:ea typeface="Microsoft YaHei"/>
               </a:rPr>
-              <a:t>按贷款等级聚合样例违约率。</a:t>
-            </a:r>
-          </a:p>
-          <a:p>
-            <a:pPr marL="342900" indent="-171450">
-              <a:buChar char="•"/>
-            </a:pPr>
-            <a:r>
-              <a:rPr lang="zh-CN" sz="2000">
-                <a:solidFill>
-                  <a:srgbClr val="374151"/>
-                </a:solidFill>
-                <a:latin typeface="Arial"/>
-                <a:ea typeface="Microsoft YaHei"/>
-              </a:rPr>
-              <a:t>用于展示未来真实 Lending Club 数据中的信用等级风险分析方式。</a:t>
-            </a:r>
-          </a:p>
-          <a:p>
-            <a:pPr marL="342900" indent="-171450">
-              <a:buChar char="•"/>
-            </a:pPr>
-            <a:r>
-              <a:rPr lang="zh-CN" sz="2000">
-                <a:solidFill>
-                  <a:srgbClr val="374151"/>
-                </a:solidFill>
-                <a:latin typeface="Arial"/>
-                <a:ea typeface="Microsoft YaHei"/>
-              </a:rPr>
-              <a:t>最终结论需在真实数据下载后重新运行生成。</a:t>
+              <a:t>贷款等级风险呈明显梯度。</a:t>
+            </a:r>
+          </a:p>
+          <a:p>
+            <a:pPr marL="342900" indent="-171450">
+              <a:buChar char="•"/>
+            </a:pPr>
+            <a:r>
+              <a:rPr lang="zh-CN" sz="2000">
+                <a:solidFill>
+                  <a:srgbClr val="374151"/>
+                </a:solidFill>
+                <a:latin typeface="Arial"/>
+                <a:ea typeface="Microsoft YaHei"/>
+              </a:rPr>
+              <a:t>A 等级违约率约 6.57%。</a:t>
+            </a:r>
+          </a:p>
+          <a:p>
+            <a:pPr marL="342900" indent="-171450">
+              <a:buChar char="•"/>
+            </a:pPr>
+            <a:r>
+              <a:rPr lang="zh-CN" sz="2000">
+                <a:solidFill>
+                  <a:srgbClr val="374151"/>
+                </a:solidFill>
+                <a:latin typeface="Arial"/>
+                <a:ea typeface="Microsoft YaHei"/>
+              </a:rPr>
+              <a:t>G 等级违约率约 51.57%。</a:t>
+            </a:r>
+          </a:p>
+          <a:p>
+            <a:pPr marL="342900" indent="-171450">
+              <a:buChar char="•"/>
+            </a:pPr>
+            <a:r>
+              <a:rPr lang="zh-CN" sz="2000">
+                <a:solidFill>
+                  <a:srgbClr val="374151"/>
+                </a:solidFill>
+                <a:latin typeface="Arial"/>
+                <a:ea typeface="Microsoft YaHei"/>
+              </a:rPr>
+              <a:t>说明平台等级体系对违约风险有强区分力，是后续多源分析的个体风险基准。</a:t>
             </a:r>
           </a:p>
         </p:txBody>
@@ -1787,7 +2421,7 @@
                 <a:latin typeface="Arial"/>
                 <a:ea typeface="Microsoft YaHei"/>
               </a:rPr>
-              <a:t>样例结果：宏观金融指标趋势</a:t>
+              <a:t>真实发现 2：利率与违约率</a:t>
             </a:r>
           </a:p>
         </p:txBody>
@@ -1823,37 +2457,52 @@
                 <a:latin typeface="Arial"/>
                 <a:ea typeface="Microsoft YaHei"/>
               </a:rPr>
-              <a:t>按年份组织联邦基金利率与通胀率。</a:t>
-            </a:r>
-          </a:p>
-          <a:p>
-            <a:pPr marL="342900" indent="-171450">
-              <a:buChar char="•"/>
-            </a:pPr>
-            <a:r>
-              <a:rPr lang="zh-CN" sz="2000">
-                <a:solidFill>
-                  <a:srgbClr val="374151"/>
-                </a:solidFill>
-                <a:latin typeface="Arial"/>
-                <a:ea typeface="Microsoft YaHei"/>
-              </a:rPr>
-              <a:t>用于说明宏观环境如何进入贷款风险分析框架。</a:t>
-            </a:r>
-          </a:p>
-          <a:p>
-            <a:pPr marL="342900" indent="-171450">
-              <a:buChar char="•"/>
-            </a:pPr>
-            <a:r>
-              <a:rPr lang="zh-CN" sz="2000">
-                <a:solidFill>
-                  <a:srgbClr val="374151"/>
-                </a:solidFill>
-                <a:latin typeface="Arial"/>
-                <a:ea typeface="Microsoft YaHei"/>
-              </a:rPr>
-              <a:t>后续将与真实贷款发放时间进行年度或季度级对齐。</a:t>
+              <a:t>利率越高，违约率越高。</a:t>
+            </a:r>
+          </a:p>
+          <a:p>
+            <a:pPr marL="342900" indent="-171450">
+              <a:buChar char="•"/>
+            </a:pPr>
+            <a:r>
+              <a:rPr lang="zh-CN" sz="2000">
+                <a:solidFill>
+                  <a:srgbClr val="374151"/>
+                </a:solidFill>
+                <a:latin typeface="Arial"/>
+                <a:ea typeface="Microsoft YaHei"/>
+              </a:rPr>
+              <a:t>&lt;8% 利率分箱违约率约 6.38%。</a:t>
+            </a:r>
+          </a:p>
+          <a:p>
+            <a:pPr marL="342900" indent="-171450">
+              <a:buChar char="•"/>
+            </a:pPr>
+            <a:r>
+              <a:rPr lang="zh-CN" sz="2000">
+                <a:solidFill>
+                  <a:srgbClr val="374151"/>
+                </a:solidFill>
+                <a:latin typeface="Arial"/>
+                <a:ea typeface="Microsoft YaHei"/>
+              </a:rPr>
+              <a:t>&gt;=24% 利率分箱违约率约 48.56%。</a:t>
+            </a:r>
+          </a:p>
+          <a:p>
+            <a:pPr marL="342900" indent="-171450">
+              <a:buChar char="•"/>
+            </a:pPr>
+            <a:r>
+              <a:rPr lang="zh-CN" sz="2000">
+                <a:solidFill>
+                  <a:srgbClr val="374151"/>
+                </a:solidFill>
+                <a:latin typeface="Arial"/>
+                <a:ea typeface="Microsoft YaHei"/>
+              </a:rPr>
+              <a:t>说明定价包含风险补偿，但高风险贷款仍有明显违约集中。</a:t>
             </a:r>
           </a:p>
         </p:txBody>
